--- a/课件/C1/C1-A-02/C1-A-02.pptx
+++ b/课件/C1/C1-A-02/C1-A-02.pptx
@@ -23,9 +23,12 @@
     <p:sldId id="271" r:id="rId17"/>
     <p:sldId id="272" r:id="rId18"/>
     <p:sldId id="273" r:id="rId19"/>
+    <p:sldId id="274" r:id="rId20"/>
+    <p:sldId id="275" r:id="rId21"/>
+    <p:sldId id="276" r:id="rId22"/>
   </p:sldIdLst>
   <p:notesMasterIdLst>
-    <p:notesMasterId r:id="rId20"/>
+    <p:notesMasterId r:id="rId23"/>
   </p:notesMasterIdLst>
   <p:sldSz cx="12191695" cy="6858000"/>
   <p:notesSz cx="6858000" cy="12191695"/>
@@ -1353,6 +1356,94 @@
 </p:notes>
 </file>
 
+<file path=ppt/notesSlides/notesSlide19.xml><?xml version="1.0" encoding="utf-8"?>
+<p:notes xmlns:a="http://schemas.openxmlformats.org/drawingml/2006/main" xmlns:r="http://schemas.openxmlformats.org/officeDocument/2006/relationships" xmlns:p="http://schemas.openxmlformats.org/presentationml/2006/main">
+  <p:cSld>
+    <p:spTree>
+      <p:nvGrpSpPr>
+        <p:cNvPr id="1" name=""/>
+        <p:cNvGrpSpPr/>
+        <p:nvPr/>
+      </p:nvGrpSpPr>
+      <p:grpSpPr>
+        <a:xfrm>
+          <a:off x="0" y="0"/>
+          <a:ext cx="0" cy="0"/>
+          <a:chOff x="0" y="0"/>
+          <a:chExt cx="0" cy="0"/>
+        </a:xfrm>
+      </p:grpSpPr>
+      <p:sp>
+        <p:nvSpPr>
+          <p:cNvPr id="2" name="Slide Image Placeholder 1"/>
+          <p:cNvSpPr>
+            <a:spLocks noGrp="1" noRot="1" noChangeAspect="1"/>
+          </p:cNvSpPr>
+          <p:nvPr>
+            <p:ph type="sldImg"/>
+          </p:nvPr>
+        </p:nvSpPr>
+        <p:spPr/>
+      </p:sp>
+      <p:sp>
+        <p:nvSpPr>
+          <p:cNvPr id="3" name="Notes Placeholder 2"/>
+          <p:cNvSpPr>
+            <a:spLocks noGrp="1"/>
+          </p:cNvSpPr>
+          <p:nvPr>
+            <p:ph type="body" idx="1"/>
+          </p:nvPr>
+        </p:nvSpPr>
+        <p:spPr/>
+        <p:txBody>
+          <a:bodyPr/>
+          <a:lstStyle/>
+          <a:p>
+            <a:r>
+              <a:rPr lang="en-US" dirty="0"/>
+              <a:t/>
+            </a:r>
+            <a:endParaRPr lang="en-US" dirty="0"/>
+          </a:p>
+        </p:txBody>
+      </p:sp>
+      <p:sp>
+        <p:nvSpPr>
+          <p:cNvPr id="4" name="Slide Number Placeholder 3"/>
+          <p:cNvSpPr>
+            <a:spLocks noGrp="1"/>
+          </p:cNvSpPr>
+          <p:nvPr>
+            <p:ph type="sldNum" sz="quarter" idx="10"/>
+          </p:nvPr>
+        </p:nvSpPr>
+        <p:spPr/>
+        <p:txBody>
+          <a:bodyPr/>
+          <a:lstStyle/>
+          <a:p>
+            <a:fld id="{F7021451-1387-4CA6-816F-3879F97B5CBC}" type="slidenum">
+              <a:rPr lang="en-US"/>
+              <a:t>19</a:t>
+            </a:fld>
+            <a:endParaRPr lang="en-US"/>
+          </a:p>
+        </p:txBody>
+      </p:sp>
+    </p:spTree>
+    <p:extLst>
+      <p:ext uri="{BB962C8B-B14F-4D97-AF65-F5344CB8AC3E}">
+        <p14:creationId xmlns:p14="http://schemas.microsoft.com/office/powerpoint/2010/main" val="1024086991"/>
+      </p:ext>
+    </p:extLst>
+  </p:cSld>
+  <p:clrMapOvr>
+    <a:masterClrMapping/>
+  </p:clrMapOvr>
+</p:notes>
+</file>
+
 <file path=ppt/notesSlides/notesSlide2.xml><?xml version="1.0" encoding="utf-8"?>
 <p:notes xmlns:a="http://schemas.openxmlformats.org/drawingml/2006/main" xmlns:r="http://schemas.openxmlformats.org/officeDocument/2006/relationships" xmlns:p="http://schemas.openxmlformats.org/presentationml/2006/main">
   <p:cSld>
@@ -1423,6 +1514,182 @@
             <a:fld id="{F7021451-1387-4CA6-816F-3879F97B5CBC}" type="slidenum">
               <a:rPr lang="en-US"/>
               <a:t>2</a:t>
+            </a:fld>
+            <a:endParaRPr lang="en-US"/>
+          </a:p>
+        </p:txBody>
+      </p:sp>
+    </p:spTree>
+    <p:extLst>
+      <p:ext uri="{BB962C8B-B14F-4D97-AF65-F5344CB8AC3E}">
+        <p14:creationId xmlns:p14="http://schemas.microsoft.com/office/powerpoint/2010/main" val="1024086991"/>
+      </p:ext>
+    </p:extLst>
+  </p:cSld>
+  <p:clrMapOvr>
+    <a:masterClrMapping/>
+  </p:clrMapOvr>
+</p:notes>
+</file>
+
+<file path=ppt/notesSlides/notesSlide20.xml><?xml version="1.0" encoding="utf-8"?>
+<p:notes xmlns:a="http://schemas.openxmlformats.org/drawingml/2006/main" xmlns:r="http://schemas.openxmlformats.org/officeDocument/2006/relationships" xmlns:p="http://schemas.openxmlformats.org/presentationml/2006/main">
+  <p:cSld>
+    <p:spTree>
+      <p:nvGrpSpPr>
+        <p:cNvPr id="1" name=""/>
+        <p:cNvGrpSpPr/>
+        <p:nvPr/>
+      </p:nvGrpSpPr>
+      <p:grpSpPr>
+        <a:xfrm>
+          <a:off x="0" y="0"/>
+          <a:ext cx="0" cy="0"/>
+          <a:chOff x="0" y="0"/>
+          <a:chExt cx="0" cy="0"/>
+        </a:xfrm>
+      </p:grpSpPr>
+      <p:sp>
+        <p:nvSpPr>
+          <p:cNvPr id="2" name="Slide Image Placeholder 1"/>
+          <p:cNvSpPr>
+            <a:spLocks noGrp="1" noRot="1" noChangeAspect="1"/>
+          </p:cNvSpPr>
+          <p:nvPr>
+            <p:ph type="sldImg"/>
+          </p:nvPr>
+        </p:nvSpPr>
+        <p:spPr/>
+      </p:sp>
+      <p:sp>
+        <p:nvSpPr>
+          <p:cNvPr id="3" name="Notes Placeholder 2"/>
+          <p:cNvSpPr>
+            <a:spLocks noGrp="1"/>
+          </p:cNvSpPr>
+          <p:nvPr>
+            <p:ph type="body" idx="1"/>
+          </p:nvPr>
+        </p:nvSpPr>
+        <p:spPr/>
+        <p:txBody>
+          <a:bodyPr/>
+          <a:lstStyle/>
+          <a:p>
+            <a:r>
+              <a:rPr lang="en-US" dirty="0"/>
+              <a:t/>
+            </a:r>
+            <a:endParaRPr lang="en-US" dirty="0"/>
+          </a:p>
+        </p:txBody>
+      </p:sp>
+      <p:sp>
+        <p:nvSpPr>
+          <p:cNvPr id="4" name="Slide Number Placeholder 3"/>
+          <p:cNvSpPr>
+            <a:spLocks noGrp="1"/>
+          </p:cNvSpPr>
+          <p:nvPr>
+            <p:ph type="sldNum" sz="quarter" idx="10"/>
+          </p:nvPr>
+        </p:nvSpPr>
+        <p:spPr/>
+        <p:txBody>
+          <a:bodyPr/>
+          <a:lstStyle/>
+          <a:p>
+            <a:fld id="{F7021451-1387-4CA6-816F-3879F97B5CBC}" type="slidenum">
+              <a:rPr lang="en-US"/>
+              <a:t>20</a:t>
+            </a:fld>
+            <a:endParaRPr lang="en-US"/>
+          </a:p>
+        </p:txBody>
+      </p:sp>
+    </p:spTree>
+    <p:extLst>
+      <p:ext uri="{BB962C8B-B14F-4D97-AF65-F5344CB8AC3E}">
+        <p14:creationId xmlns:p14="http://schemas.microsoft.com/office/powerpoint/2010/main" val="1024086991"/>
+      </p:ext>
+    </p:extLst>
+  </p:cSld>
+  <p:clrMapOvr>
+    <a:masterClrMapping/>
+  </p:clrMapOvr>
+</p:notes>
+</file>
+
+<file path=ppt/notesSlides/notesSlide21.xml><?xml version="1.0" encoding="utf-8"?>
+<p:notes xmlns:a="http://schemas.openxmlformats.org/drawingml/2006/main" xmlns:r="http://schemas.openxmlformats.org/officeDocument/2006/relationships" xmlns:p="http://schemas.openxmlformats.org/presentationml/2006/main">
+  <p:cSld>
+    <p:spTree>
+      <p:nvGrpSpPr>
+        <p:cNvPr id="1" name=""/>
+        <p:cNvGrpSpPr/>
+        <p:nvPr/>
+      </p:nvGrpSpPr>
+      <p:grpSpPr>
+        <a:xfrm>
+          <a:off x="0" y="0"/>
+          <a:ext cx="0" cy="0"/>
+          <a:chOff x="0" y="0"/>
+          <a:chExt cx="0" cy="0"/>
+        </a:xfrm>
+      </p:grpSpPr>
+      <p:sp>
+        <p:nvSpPr>
+          <p:cNvPr id="2" name="Slide Image Placeholder 1"/>
+          <p:cNvSpPr>
+            <a:spLocks noGrp="1" noRot="1" noChangeAspect="1"/>
+          </p:cNvSpPr>
+          <p:nvPr>
+            <p:ph type="sldImg"/>
+          </p:nvPr>
+        </p:nvSpPr>
+        <p:spPr/>
+      </p:sp>
+      <p:sp>
+        <p:nvSpPr>
+          <p:cNvPr id="3" name="Notes Placeholder 2"/>
+          <p:cNvSpPr>
+            <a:spLocks noGrp="1"/>
+          </p:cNvSpPr>
+          <p:nvPr>
+            <p:ph type="body" idx="1"/>
+          </p:nvPr>
+        </p:nvSpPr>
+        <p:spPr/>
+        <p:txBody>
+          <a:bodyPr/>
+          <a:lstStyle/>
+          <a:p>
+            <a:r>
+              <a:rPr lang="en-US" dirty="0"/>
+              <a:t/>
+            </a:r>
+            <a:endParaRPr lang="en-US" dirty="0"/>
+          </a:p>
+        </p:txBody>
+      </p:sp>
+      <p:sp>
+        <p:nvSpPr>
+          <p:cNvPr id="4" name="Slide Number Placeholder 3"/>
+          <p:cNvSpPr>
+            <a:spLocks noGrp="1"/>
+          </p:cNvSpPr>
+          <p:nvPr>
+            <p:ph type="sldNum" sz="quarter" idx="10"/>
+          </p:nvPr>
+        </p:nvSpPr>
+        <p:spPr/>
+        <p:txBody>
+          <a:bodyPr/>
+          <a:lstStyle/>
+          <a:p>
+            <a:fld id="{F7021451-1387-4CA6-816F-3879F97B5CBC}" type="slidenum">
+              <a:rPr lang="en-US"/>
+              <a:t>21</a:t>
             </a:fld>
             <a:endParaRPr lang="en-US"/>
           </a:p>
@@ -2428,7 +2695,7 @@
                 <a:ea typeface="微软雅黑" pitchFamily="34" charset="-122"/>
                 <a:cs typeface="微软雅黑" pitchFamily="34" charset="-120"/>
               </a:rPr>
-              <a:t>1 / 18</a:t>
+              <a:t>1 / 21</a:t>
             </a:r>
             <a:endParaRPr lang="en-US" sz="1000" dirty="0"/>
           </a:p>
@@ -2662,7 +2929,7 @@
                 <a:ea typeface="微软雅黑" pitchFamily="34" charset="-122"/>
                 <a:cs typeface="微软雅黑" pitchFamily="34" charset="-120"/>
               </a:rPr>
-              <a:t>10 / 18</a:t>
+              <a:t>10 / 21</a:t>
             </a:r>
             <a:endParaRPr lang="en-US" sz="1000" dirty="0"/>
           </a:p>
@@ -2761,19 +3028,34 @@
             <a:avLst/>
           </a:prstGeom>
           <a:solidFill>
-            <a:srgbClr val="F5F6F7"/>
+            <a:srgbClr val="F7F9FC"/>
           </a:solidFill>
-          <a:ln w="9525">
-            <a:solidFill>
-              <a:srgbClr val="D8DBE0"/>
-            </a:solidFill>
-            <a:prstDash val="solid"/>
-          </a:ln>
-        </p:spPr>
-      </p:sp>
-      <p:sp>
-        <p:nvSpPr>
-          <p:cNvPr id="6" name="Text 4"/>
+          <a:ln/>
+        </p:spPr>
+      </p:sp>
+      <p:sp>
+        <p:nvSpPr>
+          <p:cNvPr id="6" name="Shape 4"/>
+          <p:cNvSpPr/>
+          <p:nvPr/>
+        </p:nvSpPr>
+        <p:spPr>
+          <a:xfrm>
+            <a:off x="822960" y="2395728"/>
+            <a:ext cx="50292" cy="1271016"/>
+          </a:xfrm>
+          <a:prstGeom prst="rect">
+            <a:avLst/>
+          </a:prstGeom>
+          <a:solidFill>
+            <a:srgbClr val="1F4E9C"/>
+          </a:solidFill>
+          <a:ln/>
+        </p:spPr>
+      </p:sp>
+      <p:sp>
+        <p:nvSpPr>
+          <p:cNvPr id="7" name="Text 5"/>
           <p:cNvSpPr/>
           <p:nvPr/>
         </p:nvSpPr>
@@ -2818,7 +3100,7 @@
       </p:sp>
       <p:sp>
         <p:nvSpPr>
-          <p:cNvPr id="7" name="Text 5"/>
+          <p:cNvPr id="8" name="Text 6"/>
           <p:cNvSpPr/>
           <p:nvPr/>
         </p:nvSpPr>
@@ -2902,7 +3184,7 @@
       </p:sp>
       <p:sp>
         <p:nvSpPr>
-          <p:cNvPr id="8" name="Text 6"/>
+          <p:cNvPr id="9" name="Text 7"/>
           <p:cNvSpPr/>
           <p:nvPr/>
         </p:nvSpPr>
@@ -2958,7 +3240,7 @@
       </p:sp>
       <p:sp>
         <p:nvSpPr>
-          <p:cNvPr id="9" name="Text 7"/>
+          <p:cNvPr id="10" name="Text 8"/>
           <p:cNvSpPr/>
           <p:nvPr/>
         </p:nvSpPr>
@@ -3084,7 +3366,7 @@
                 <a:ea typeface="微软雅黑" pitchFamily="34" charset="-122"/>
                 <a:cs typeface="微软雅黑" pitchFamily="34" charset="-120"/>
               </a:rPr>
-              <a:t>11 / 18</a:t>
+              <a:t>11 / 21</a:t>
             </a:r>
             <a:endParaRPr lang="en-US" sz="1000" dirty="0"/>
           </a:p>
@@ -3343,7 +3625,7 @@
                 <a:ea typeface="微软雅黑" pitchFamily="34" charset="-122"/>
                 <a:cs typeface="微软雅黑" pitchFamily="34" charset="-120"/>
               </a:rPr>
-              <a:t>12 / 18</a:t>
+              <a:t>12 / 21</a:t>
             </a:r>
             <a:endParaRPr lang="en-US" sz="1000" dirty="0"/>
           </a:p>
@@ -3442,19 +3724,34 @@
             <a:avLst/>
           </a:prstGeom>
           <a:solidFill>
-            <a:srgbClr val="F5F6F7"/>
+            <a:srgbClr val="F7F9FC"/>
           </a:solidFill>
-          <a:ln w="9525">
-            <a:solidFill>
-              <a:srgbClr val="D8DBE0"/>
-            </a:solidFill>
-            <a:prstDash val="solid"/>
-          </a:ln>
-        </p:spPr>
-      </p:sp>
-      <p:sp>
-        <p:nvSpPr>
-          <p:cNvPr id="6" name="Text 4"/>
+          <a:ln/>
+        </p:spPr>
+      </p:sp>
+      <p:sp>
+        <p:nvSpPr>
+          <p:cNvPr id="6" name="Shape 4"/>
+          <p:cNvSpPr/>
+          <p:nvPr/>
+        </p:nvSpPr>
+        <p:spPr>
+          <a:xfrm>
+            <a:off x="822960" y="2395728"/>
+            <a:ext cx="50292" cy="2935224"/>
+          </a:xfrm>
+          <a:prstGeom prst="rect">
+            <a:avLst/>
+          </a:prstGeom>
+          <a:solidFill>
+            <a:srgbClr val="1F4E9C"/>
+          </a:solidFill>
+          <a:ln/>
+        </p:spPr>
+      </p:sp>
+      <p:sp>
+        <p:nvSpPr>
+          <p:cNvPr id="7" name="Text 5"/>
           <p:cNvSpPr/>
           <p:nvPr/>
         </p:nvSpPr>
@@ -3506,7 +3803,7 @@
       </p:sp>
       <p:sp>
         <p:nvSpPr>
-          <p:cNvPr id="7" name="Text 5"/>
+          <p:cNvPr id="8" name="Text 6"/>
           <p:cNvSpPr/>
           <p:nvPr/>
         </p:nvSpPr>
@@ -3615,7 +3912,7 @@
                 <a:ea typeface="微软雅黑" pitchFamily="34" charset="-122"/>
                 <a:cs typeface="微软雅黑" pitchFamily="34" charset="-120"/>
               </a:rPr>
-              <a:t>13 / 18</a:t>
+              <a:t>13 / 21</a:t>
             </a:r>
             <a:endParaRPr lang="en-US" sz="1000" dirty="0"/>
           </a:p>
@@ -3714,19 +4011,34 @@
             <a:avLst/>
           </a:prstGeom>
           <a:solidFill>
-            <a:srgbClr val="F5F6F7"/>
+            <a:srgbClr val="F7F9FC"/>
           </a:solidFill>
-          <a:ln w="9525">
-            <a:solidFill>
-              <a:srgbClr val="D8DBE0"/>
-            </a:solidFill>
-            <a:prstDash val="solid"/>
-          </a:ln>
-        </p:spPr>
-      </p:sp>
-      <p:sp>
-        <p:nvSpPr>
-          <p:cNvPr id="6" name="Text 4"/>
+          <a:ln/>
+        </p:spPr>
+      </p:sp>
+      <p:sp>
+        <p:nvSpPr>
+          <p:cNvPr id="6" name="Shape 4"/>
+          <p:cNvSpPr/>
+          <p:nvPr/>
+        </p:nvSpPr>
+        <p:spPr>
+          <a:xfrm>
+            <a:off x="822960" y="2395728"/>
+            <a:ext cx="50292" cy="1508760"/>
+          </a:xfrm>
+          <a:prstGeom prst="rect">
+            <a:avLst/>
+          </a:prstGeom>
+          <a:solidFill>
+            <a:srgbClr val="1F4E9C"/>
+          </a:solidFill>
+          <a:ln/>
+        </p:spPr>
+      </p:sp>
+      <p:sp>
+        <p:nvSpPr>
+          <p:cNvPr id="7" name="Text 5"/>
           <p:cNvSpPr/>
           <p:nvPr/>
         </p:nvSpPr>
@@ -3772,7 +4084,7 @@
       </p:sp>
       <p:sp>
         <p:nvSpPr>
-          <p:cNvPr id="7" name="Text 5"/>
+          <p:cNvPr id="8" name="Text 6"/>
           <p:cNvSpPr/>
           <p:nvPr/>
         </p:nvSpPr>
@@ -3856,7 +4168,7 @@
       </p:sp>
       <p:sp>
         <p:nvSpPr>
-          <p:cNvPr id="8" name="Text 6"/>
+          <p:cNvPr id="9" name="Text 7"/>
           <p:cNvSpPr/>
           <p:nvPr/>
         </p:nvSpPr>
@@ -3926,7 +4238,7 @@
       </p:sp>
       <p:sp>
         <p:nvSpPr>
-          <p:cNvPr id="9" name="Text 7"/>
+          <p:cNvPr id="10" name="Text 8"/>
           <p:cNvSpPr/>
           <p:nvPr/>
         </p:nvSpPr>
@@ -4066,7 +4378,7 @@
                 <a:ea typeface="微软雅黑" pitchFamily="34" charset="-122"/>
                 <a:cs typeface="微软雅黑" pitchFamily="34" charset="-120"/>
               </a:rPr>
-              <a:t>14 / 18</a:t>
+              <a:t>14 / 21</a:t>
             </a:r>
             <a:endParaRPr lang="en-US" sz="1000" dirty="0"/>
           </a:p>
@@ -4165,19 +4477,34 @@
             <a:avLst/>
           </a:prstGeom>
           <a:solidFill>
-            <a:srgbClr val="F5F6F7"/>
+            <a:srgbClr val="F7F9FC"/>
           </a:solidFill>
-          <a:ln w="9525">
-            <a:solidFill>
-              <a:srgbClr val="D8DBE0"/>
-            </a:solidFill>
-            <a:prstDash val="solid"/>
-          </a:ln>
-        </p:spPr>
-      </p:sp>
-      <p:sp>
-        <p:nvSpPr>
-          <p:cNvPr id="6" name="Text 4"/>
+          <a:ln/>
+        </p:spPr>
+      </p:sp>
+      <p:sp>
+        <p:nvSpPr>
+          <p:cNvPr id="6" name="Shape 4"/>
+          <p:cNvSpPr/>
+          <p:nvPr/>
+        </p:nvSpPr>
+        <p:spPr>
+          <a:xfrm>
+            <a:off x="822960" y="2395728"/>
+            <a:ext cx="50292" cy="1271016"/>
+          </a:xfrm>
+          <a:prstGeom prst="rect">
+            <a:avLst/>
+          </a:prstGeom>
+          <a:solidFill>
+            <a:srgbClr val="1F4E9C"/>
+          </a:solidFill>
+          <a:ln/>
+        </p:spPr>
+      </p:sp>
+      <p:sp>
+        <p:nvSpPr>
+          <p:cNvPr id="7" name="Text 5"/>
           <p:cNvSpPr/>
           <p:nvPr/>
         </p:nvSpPr>
@@ -4222,7 +4549,7 @@
       </p:sp>
       <p:sp>
         <p:nvSpPr>
-          <p:cNvPr id="7" name="Text 5"/>
+          <p:cNvPr id="8" name="Text 6"/>
           <p:cNvSpPr/>
           <p:nvPr/>
         </p:nvSpPr>
@@ -4292,7 +4619,7 @@
       </p:sp>
       <p:sp>
         <p:nvSpPr>
-          <p:cNvPr id="8" name="Text 6"/>
+          <p:cNvPr id="9" name="Text 7"/>
           <p:cNvSpPr/>
           <p:nvPr/>
         </p:nvSpPr>
@@ -4348,7 +4675,7 @@
       </p:sp>
       <p:sp>
         <p:nvSpPr>
-          <p:cNvPr id="9" name="Text 7"/>
+          <p:cNvPr id="10" name="Text 8"/>
           <p:cNvSpPr/>
           <p:nvPr/>
         </p:nvSpPr>
@@ -4474,7 +4801,7 @@
                 <a:ea typeface="微软雅黑" pitchFamily="34" charset="-122"/>
                 <a:cs typeface="微软雅黑" pitchFamily="34" charset="-120"/>
               </a:rPr>
-              <a:t>15 / 18</a:t>
+              <a:t>15 / 21</a:t>
             </a:r>
             <a:endParaRPr lang="en-US" sz="1000" dirty="0"/>
           </a:p>
@@ -4573,19 +4900,34 @@
             <a:avLst/>
           </a:prstGeom>
           <a:solidFill>
-            <a:srgbClr val="F5F6F7"/>
+            <a:srgbClr val="F7F9FC"/>
           </a:solidFill>
-          <a:ln w="9525">
-            <a:solidFill>
-              <a:srgbClr val="D8DBE0"/>
-            </a:solidFill>
-            <a:prstDash val="solid"/>
-          </a:ln>
-        </p:spPr>
-      </p:sp>
-      <p:sp>
-        <p:nvSpPr>
-          <p:cNvPr id="6" name="Text 4"/>
+          <a:ln/>
+        </p:spPr>
+      </p:sp>
+      <p:sp>
+        <p:nvSpPr>
+          <p:cNvPr id="6" name="Shape 4"/>
+          <p:cNvSpPr/>
+          <p:nvPr/>
+        </p:nvSpPr>
+        <p:spPr>
+          <a:xfrm>
+            <a:off x="822960" y="2395728"/>
+            <a:ext cx="50292" cy="1508760"/>
+          </a:xfrm>
+          <a:prstGeom prst="rect">
+            <a:avLst/>
+          </a:prstGeom>
+          <a:solidFill>
+            <a:srgbClr val="1F4E9C"/>
+          </a:solidFill>
+          <a:ln/>
+        </p:spPr>
+      </p:sp>
+      <p:sp>
+        <p:nvSpPr>
+          <p:cNvPr id="7" name="Text 5"/>
           <p:cNvSpPr/>
           <p:nvPr/>
         </p:nvSpPr>
@@ -4631,7 +4973,7 @@
       </p:sp>
       <p:sp>
         <p:nvSpPr>
-          <p:cNvPr id="7" name="Text 5"/>
+          <p:cNvPr id="8" name="Text 6"/>
           <p:cNvSpPr/>
           <p:nvPr/>
         </p:nvSpPr>
@@ -4687,7 +5029,7 @@
       </p:sp>
       <p:sp>
         <p:nvSpPr>
-          <p:cNvPr id="8" name="Text 6"/>
+          <p:cNvPr id="9" name="Text 7"/>
           <p:cNvSpPr/>
           <p:nvPr/>
         </p:nvSpPr>
@@ -4771,7 +5113,7 @@
       </p:sp>
       <p:sp>
         <p:nvSpPr>
-          <p:cNvPr id="9" name="Text 7"/>
+          <p:cNvPr id="10" name="Text 8"/>
           <p:cNvSpPr/>
           <p:nvPr/>
         </p:nvSpPr>
@@ -4897,7 +5239,7 @@
                 <a:ea typeface="微软雅黑" pitchFamily="34" charset="-122"/>
                 <a:cs typeface="微软雅黑" pitchFamily="34" charset="-120"/>
               </a:rPr>
-              <a:t>16 / 18</a:t>
+              <a:t>16 / 21</a:t>
             </a:r>
             <a:endParaRPr lang="en-US" sz="1000" dirty="0"/>
           </a:p>
@@ -4996,19 +5338,34 @@
             <a:avLst/>
           </a:prstGeom>
           <a:solidFill>
-            <a:srgbClr val="F5F6F7"/>
+            <a:srgbClr val="F7F9FC"/>
           </a:solidFill>
-          <a:ln w="9525">
-            <a:solidFill>
-              <a:srgbClr val="D8DBE0"/>
-            </a:solidFill>
-            <a:prstDash val="solid"/>
-          </a:ln>
-        </p:spPr>
-      </p:sp>
-      <p:sp>
-        <p:nvSpPr>
-          <p:cNvPr id="6" name="Text 4"/>
+          <a:ln/>
+        </p:spPr>
+      </p:sp>
+      <p:sp>
+        <p:nvSpPr>
+          <p:cNvPr id="6" name="Shape 4"/>
+          <p:cNvSpPr/>
+          <p:nvPr/>
+        </p:nvSpPr>
+        <p:spPr>
+          <a:xfrm>
+            <a:off x="822960" y="2395728"/>
+            <a:ext cx="50292" cy="1508760"/>
+          </a:xfrm>
+          <a:prstGeom prst="rect">
+            <a:avLst/>
+          </a:prstGeom>
+          <a:solidFill>
+            <a:srgbClr val="1F4E9C"/>
+          </a:solidFill>
+          <a:ln/>
+        </p:spPr>
+      </p:sp>
+      <p:sp>
+        <p:nvSpPr>
+          <p:cNvPr id="7" name="Text 5"/>
           <p:cNvSpPr/>
           <p:nvPr/>
         </p:nvSpPr>
@@ -5054,7 +5411,7 @@
       </p:sp>
       <p:sp>
         <p:nvSpPr>
-          <p:cNvPr id="7" name="Text 5"/>
+          <p:cNvPr id="8" name="Text 6"/>
           <p:cNvSpPr/>
           <p:nvPr/>
         </p:nvSpPr>
@@ -5138,7 +5495,7 @@
       </p:sp>
       <p:sp>
         <p:nvSpPr>
-          <p:cNvPr id="8" name="Text 6"/>
+          <p:cNvPr id="9" name="Text 7"/>
           <p:cNvSpPr/>
           <p:nvPr/>
         </p:nvSpPr>
@@ -5194,7 +5551,7 @@
       </p:sp>
       <p:sp>
         <p:nvSpPr>
-          <p:cNvPr id="9" name="Text 7"/>
+          <p:cNvPr id="10" name="Text 8"/>
           <p:cNvSpPr/>
           <p:nvPr/>
         </p:nvSpPr>
@@ -5320,7 +5677,7 @@
                 <a:ea typeface="微软雅黑" pitchFamily="34" charset="-122"/>
                 <a:cs typeface="微软雅黑" pitchFamily="34" charset="-120"/>
               </a:rPr>
-              <a:t>17 / 18</a:t>
+              <a:t>17 / 21</a:t>
             </a:r>
             <a:endParaRPr lang="en-US" sz="1000" dirty="0"/>
           </a:p>
@@ -5711,7 +6068,7 @@
                 <a:ea typeface="微软雅黑" pitchFamily="34" charset="-122"/>
                 <a:cs typeface="微软雅黑" pitchFamily="34" charset="-120"/>
               </a:rPr>
-              <a:t>18 / 18</a:t>
+              <a:t>18 / 21</a:t>
             </a:r>
             <a:endParaRPr lang="en-US" sz="1000" dirty="0"/>
           </a:p>
@@ -6038,9 +6395,367 @@
                 <a:ea typeface="微软雅黑" pitchFamily="34" charset="-122"/>
                 <a:cs typeface="微软雅黑" pitchFamily="34" charset="-120"/>
               </a:rPr>
-              <a:t>写完对照讲稿附录的参考答案；要求：合上笔记能默写"声明—赋值—打印"三行</a:t>
+              <a:t>参考答案在本PPT最后三页，课后自行对照；要求：合上笔记能默写"声明—赋值—打印"三行</a:t>
             </a:r>
             <a:endParaRPr lang="en-US" sz="1500" dirty="0"/>
+          </a:p>
+        </p:txBody>
+      </p:sp>
+    </p:spTree>
+  </p:cSld>
+  <p:clrMapOvr>
+    <a:masterClrMapping/>
+  </p:clrMapOvr>
+</p:sld>
+</file>
+
+<file path=ppt/slides/slide19.xml><?xml version="1.0" encoding="utf-8"?>
+<p:sld xmlns:a="http://schemas.openxmlformats.org/drawingml/2006/main" xmlns:r="http://schemas.openxmlformats.org/officeDocument/2006/relationships" xmlns:p="http://schemas.openxmlformats.org/presentationml/2006/main">
+  <p:cSld name="Slide 19">
+    <p:bg>
+      <p:bgPr>
+        <a:blipFill dpi="0" rotWithShape="1">
+          <a:blip r:embed="rId1">
+            <a:lum/>
+          </a:blip>
+          <a:srcRect/>
+          <a:stretch>
+            <a:fillRect/>
+          </a:stretch>
+        </a:blipFill>
+        <a:effectLst/>
+      </p:bgPr>
+    </p:bg>
+    <p:spTree>
+      <p:nvGrpSpPr>
+        <p:cNvPr id="1" name=""/>
+        <p:cNvGrpSpPr/>
+        <p:nvPr/>
+      </p:nvGrpSpPr>
+      <p:grpSpPr>
+        <a:xfrm>
+          <a:off x="0" y="0"/>
+          <a:ext cx="0" cy="0"/>
+          <a:chOff x="0" y="0"/>
+          <a:chExt cx="0" cy="0"/>
+        </a:xfrm>
+      </p:grpSpPr>
+      <p:sp>
+        <p:nvSpPr>
+          <p:cNvPr id="2" name="Text 0"/>
+          <p:cNvSpPr/>
+          <p:nvPr/>
+        </p:nvSpPr>
+        <p:spPr>
+          <a:xfrm>
+            <a:off x="10362895" y="6016752"/>
+            <a:ext cx="1463040" cy="320040"/>
+          </a:xfrm>
+          <a:prstGeom prst="rect">
+            <a:avLst/>
+          </a:prstGeom>
+          <a:noFill/>
+          <a:ln/>
+        </p:spPr>
+        <p:txBody>
+          <a:bodyPr wrap="square" rtlCol="0" anchor="ctr"/>
+          <a:lstStyle/>
+          <a:p>
+            <a:pPr algn="r" indent="0" marL="0">
+              <a:buNone/>
+            </a:pPr>
+            <a:r>
+              <a:rPr lang="en-US" sz="1000" dirty="0">
+                <a:solidFill>
+                  <a:srgbClr val="8A9099"/>
+                </a:solidFill>
+                <a:latin typeface="微软雅黑" pitchFamily="34" charset="0"/>
+                <a:ea typeface="微软雅黑" pitchFamily="34" charset="-122"/>
+                <a:cs typeface="微软雅黑" pitchFamily="34" charset="-120"/>
+              </a:rPr>
+              <a:t>19 / 21</a:t>
+            </a:r>
+            <a:endParaRPr lang="en-US" sz="1000" dirty="0"/>
+          </a:p>
+        </p:txBody>
+      </p:sp>
+      <p:sp>
+        <p:nvSpPr>
+          <p:cNvPr id="3" name="Text 1"/>
+          <p:cNvSpPr/>
+          <p:nvPr/>
+        </p:nvSpPr>
+        <p:spPr>
+          <a:xfrm>
+            <a:off x="822960" y="960120"/>
+            <a:ext cx="10545775" cy="365760"/>
+          </a:xfrm>
+          <a:prstGeom prst="rect">
+            <a:avLst/>
+          </a:prstGeom>
+          <a:noFill/>
+          <a:ln/>
+        </p:spPr>
+        <p:txBody>
+          <a:bodyPr wrap="square" rtlCol="0" anchor="ctr"/>
+          <a:lstStyle/>
+          <a:p>
+            <a:pPr algn="l" indent="0" marL="0">
+              <a:buNone/>
+            </a:pPr>
+            <a:r>
+              <a:rPr lang="en-US" sz="1400" b="1" dirty="0">
+                <a:solidFill>
+                  <a:srgbClr val="1F4E9C"/>
+                </a:solidFill>
+                <a:latin typeface="微软雅黑" pitchFamily="34" charset="0"/>
+                <a:ea typeface="微软雅黑" pitchFamily="34" charset="-122"/>
+                <a:cs typeface="微软雅黑" pitchFamily="34" charset="-120"/>
+              </a:rPr>
+              <a:t>参考答案 · 跟练题</a:t>
+            </a:r>
+            <a:endParaRPr lang="en-US" sz="1400" dirty="0"/>
+          </a:p>
+        </p:txBody>
+      </p:sp>
+      <p:sp>
+        <p:nvSpPr>
+          <p:cNvPr id="4" name="Text 2"/>
+          <p:cNvSpPr/>
+          <p:nvPr/>
+        </p:nvSpPr>
+        <p:spPr>
+          <a:xfrm>
+            <a:off x="822960" y="1344168"/>
+            <a:ext cx="10545775" cy="731520"/>
+          </a:xfrm>
+          <a:prstGeom prst="rect">
+            <a:avLst/>
+          </a:prstGeom>
+          <a:noFill/>
+          <a:ln/>
+        </p:spPr>
+        <p:txBody>
+          <a:bodyPr wrap="square" rtlCol="0" anchor="ctr"/>
+          <a:lstStyle/>
+          <a:p>
+            <a:pPr algn="l" indent="0" marL="0">
+              <a:buNone/>
+            </a:pPr>
+            <a:r>
+              <a:rPr lang="en-US" sz="2800" b="1" dirty="0">
+                <a:solidFill>
+                  <a:srgbClr val="1F2329"/>
+                </a:solidFill>
+                <a:latin typeface="微软雅黑" pitchFamily="34" charset="0"/>
+                <a:ea typeface="微软雅黑" pitchFamily="34" charset="-122"/>
+                <a:cs typeface="微软雅黑" pitchFamily="34" charset="-120"/>
+              </a:rPr>
+              <a:t>跟练题参考答案（自行对照）</a:t>
+            </a:r>
+            <a:endParaRPr lang="en-US" sz="2800" dirty="0"/>
+          </a:p>
+        </p:txBody>
+      </p:sp>
+      <p:sp>
+        <p:nvSpPr>
+          <p:cNvPr id="5" name="Shape 3"/>
+          <p:cNvSpPr/>
+          <p:nvPr/>
+        </p:nvSpPr>
+        <p:spPr>
+          <a:xfrm>
+            <a:off x="822960" y="2395728"/>
+            <a:ext cx="10545775" cy="2459736"/>
+          </a:xfrm>
+          <a:prstGeom prst="rect">
+            <a:avLst/>
+          </a:prstGeom>
+          <a:solidFill>
+            <a:srgbClr val="F7F9FC"/>
+          </a:solidFill>
+          <a:ln/>
+        </p:spPr>
+      </p:sp>
+      <p:sp>
+        <p:nvSpPr>
+          <p:cNvPr id="6" name="Shape 4"/>
+          <p:cNvSpPr/>
+          <p:nvPr/>
+        </p:nvSpPr>
+        <p:spPr>
+          <a:xfrm>
+            <a:off x="822960" y="2395728"/>
+            <a:ext cx="50292" cy="2459736"/>
+          </a:xfrm>
+          <a:prstGeom prst="rect">
+            <a:avLst/>
+          </a:prstGeom>
+          <a:solidFill>
+            <a:srgbClr val="1F4E9C"/>
+          </a:solidFill>
+          <a:ln/>
+        </p:spPr>
+      </p:sp>
+      <p:sp>
+        <p:nvSpPr>
+          <p:cNvPr id="7" name="Text 5"/>
+          <p:cNvSpPr/>
+          <p:nvPr/>
+        </p:nvSpPr>
+        <p:spPr>
+          <a:xfrm>
+            <a:off x="1078992" y="2505456"/>
+            <a:ext cx="10033711" cy="2240280"/>
+          </a:xfrm>
+          <a:prstGeom prst="rect">
+            <a:avLst/>
+          </a:prstGeom>
+          <a:noFill/>
+          <a:ln/>
+        </p:spPr>
+        <p:txBody>
+          <a:bodyPr wrap="square" rtlCol="0" anchor="t"/>
+          <a:lstStyle/>
+          <a:p>
+            <a:pPr algn="l" indent="0" marL="0">
+              <a:lnSpc>
+                <a:spcPct val="125000"/>
+              </a:lnSpc>
+              <a:buNone/>
+            </a:pPr>
+            <a:r>
+              <a:rPr lang="en-US" sz="1400" dirty="0">
+                <a:solidFill>
+                  <a:srgbClr val="1F2329"/>
+                </a:solidFill>
+                <a:latin typeface="Consolas" pitchFamily="34" charset="0"/>
+                <a:ea typeface="Consolas" pitchFamily="34" charset="-122"/>
+                <a:cs typeface="Consolas" pitchFamily="34" charset="-120"/>
+              </a:rPr>
+              <a:t>#include &lt;stdio.h&gt;
+int main(){
+    int target;
+    printf("请输入你的目标分数：");
+    scanf("%d", &amp;target);
+    printf("你的目标分数是：%d\n", target);
+    return 0;
+}
+</a:t>
+            </a:r>
+            <a:endParaRPr lang="en-US" sz="1400" dirty="0"/>
+          </a:p>
+        </p:txBody>
+      </p:sp>
+      <p:sp>
+        <p:nvSpPr>
+          <p:cNvPr id="8" name="Text 6"/>
+          <p:cNvSpPr/>
+          <p:nvPr/>
+        </p:nvSpPr>
+        <p:spPr>
+          <a:xfrm>
+            <a:off x="896112" y="5056632"/>
+            <a:ext cx="10454335" cy="397764"/>
+          </a:xfrm>
+          <a:prstGeom prst="rect">
+            <a:avLst/>
+          </a:prstGeom>
+          <a:noFill/>
+          <a:ln/>
+        </p:spPr>
+        <p:txBody>
+          <a:bodyPr wrap="square" rtlCol="0" anchor="t"/>
+          <a:lstStyle/>
+          <a:p>
+            <a:pPr algn="l" indent="0" marL="0">
+              <a:lnSpc>
+                <a:spcPct val="115000"/>
+              </a:lnSpc>
+              <a:buNone/>
+            </a:pPr>
+            <a:r>
+              <a:rPr lang="en-US" sz="1800" b="1" dirty="0">
+                <a:solidFill>
+                  <a:srgbClr val="1F4E9C"/>
+                </a:solidFill>
+                <a:latin typeface="微软雅黑" pitchFamily="34" charset="0"/>
+                <a:ea typeface="微软雅黑" pitchFamily="34" charset="-122"/>
+                <a:cs typeface="微软雅黑" pitchFamily="34" charset="-120"/>
+              </a:rPr>
+              <a:t>•  </a:t>
+            </a:r>
+            <a:pPr algn="l" indent="0" marL="0">
+              <a:lnSpc>
+                <a:spcPct val="115000"/>
+              </a:lnSpc>
+              <a:buNone/>
+            </a:pPr>
+            <a:r>
+              <a:rPr lang="en-US" sz="1800" dirty="0">
+                <a:solidFill>
+                  <a:srgbClr val="000000"/>
+                </a:solidFill>
+              </a:rPr>
+              <a:t>scanf 读整数配 %d，变量前面要加取地址符</a:t>
+            </a:r>
+            <a:endParaRPr lang="en-US" sz="1800" dirty="0"/>
+          </a:p>
+        </p:txBody>
+      </p:sp>
+      <p:sp>
+        <p:nvSpPr>
+          <p:cNvPr id="9" name="Text 7"/>
+          <p:cNvSpPr/>
+          <p:nvPr/>
+        </p:nvSpPr>
+        <p:spPr>
+          <a:xfrm>
+            <a:off x="896112" y="5527548"/>
+            <a:ext cx="10454335" cy="397764"/>
+          </a:xfrm>
+          <a:prstGeom prst="rect">
+            <a:avLst/>
+          </a:prstGeom>
+          <a:noFill/>
+          <a:ln/>
+        </p:spPr>
+        <p:txBody>
+          <a:bodyPr wrap="square" rtlCol="0" anchor="t"/>
+          <a:lstStyle/>
+          <a:p>
+            <a:pPr algn="l" indent="0" marL="0">
+              <a:lnSpc>
+                <a:spcPct val="115000"/>
+              </a:lnSpc>
+              <a:buNone/>
+            </a:pPr>
+            <a:r>
+              <a:rPr lang="en-US" sz="1800" b="1" dirty="0">
+                <a:solidFill>
+                  <a:srgbClr val="1F4E9C"/>
+                </a:solidFill>
+                <a:latin typeface="微软雅黑" pitchFamily="34" charset="0"/>
+                <a:ea typeface="微软雅黑" pitchFamily="34" charset="-122"/>
+                <a:cs typeface="微软雅黑" pitchFamily="34" charset="-120"/>
+              </a:rPr>
+              <a:t>•  </a:t>
+            </a:r>
+            <a:pPr algn="l" indent="0" marL="0">
+              <a:lnSpc>
+                <a:spcPct val="115000"/>
+              </a:lnSpc>
+              <a:buNone/>
+            </a:pPr>
+            <a:r>
+              <a:rPr lang="en-US" sz="1800" dirty="0">
+                <a:solidFill>
+                  <a:srgbClr val="000000"/>
+                </a:solidFill>
+              </a:rPr>
+              <a:t>先提示、再读入、后输出，三步走成一条闭环</a:t>
+            </a:r>
+            <a:endParaRPr lang="en-US" sz="1800" dirty="0"/>
           </a:p>
         </p:txBody>
       </p:sp>
@@ -6116,7 +6831,7 @@
                 <a:ea typeface="微软雅黑" pitchFamily="34" charset="-122"/>
                 <a:cs typeface="微软雅黑" pitchFamily="34" charset="-120"/>
               </a:rPr>
-              <a:t>2 / 18</a:t>
+              <a:t>2 / 21</a:t>
             </a:r>
             <a:endParaRPr lang="en-US" sz="1000" dirty="0"/>
           </a:p>
@@ -6281,19 +6996,34 @@
             <a:avLst/>
           </a:prstGeom>
           <a:solidFill>
-            <a:srgbClr val="F5F6F7"/>
+            <a:srgbClr val="F7F9FC"/>
           </a:solidFill>
-          <a:ln w="9525">
-            <a:solidFill>
-              <a:srgbClr val="D8DBE0"/>
-            </a:solidFill>
-            <a:prstDash val="solid"/>
-          </a:ln>
-        </p:spPr>
-      </p:sp>
-      <p:sp>
-        <p:nvSpPr>
-          <p:cNvPr id="8" name="Text 6"/>
+          <a:ln/>
+        </p:spPr>
+      </p:sp>
+      <p:sp>
+        <p:nvSpPr>
+          <p:cNvPr id="8" name="Shape 6"/>
+          <p:cNvSpPr/>
+          <p:nvPr/>
+        </p:nvSpPr>
+        <p:spPr>
+          <a:xfrm>
+            <a:off x="822960" y="2395728"/>
+            <a:ext cx="50292" cy="795528"/>
+          </a:xfrm>
+          <a:prstGeom prst="rect">
+            <a:avLst/>
+          </a:prstGeom>
+          <a:solidFill>
+            <a:srgbClr val="1F4E9C"/>
+          </a:solidFill>
+          <a:ln/>
+        </p:spPr>
+      </p:sp>
+      <p:sp>
+        <p:nvSpPr>
+          <p:cNvPr id="9" name="Text 7"/>
           <p:cNvSpPr/>
           <p:nvPr/>
         </p:nvSpPr>
@@ -6336,7 +7066,7 @@
       </p:sp>
       <p:sp>
         <p:nvSpPr>
-          <p:cNvPr id="9" name="Text 7"/>
+          <p:cNvPr id="10" name="Text 8"/>
           <p:cNvSpPr/>
           <p:nvPr/>
         </p:nvSpPr>
@@ -6420,7 +7150,7 @@
       </p:sp>
       <p:sp>
         <p:nvSpPr>
-          <p:cNvPr id="10" name="Text 8"/>
+          <p:cNvPr id="11" name="Text 9"/>
           <p:cNvSpPr/>
           <p:nvPr/>
         </p:nvSpPr>
@@ -6504,7 +7234,7 @@
       </p:sp>
       <p:sp>
         <p:nvSpPr>
-          <p:cNvPr id="11" name="Text 9"/>
+          <p:cNvPr id="12" name="Text 10"/>
           <p:cNvSpPr/>
           <p:nvPr/>
         </p:nvSpPr>
@@ -6567,6 +7297,720 @@
                 </a:solidFill>
               </a:rPr>
               <a:t>存数据、算类型、让数据进出程序</a:t>
+            </a:r>
+            <a:endParaRPr lang="en-US" sz="1800" dirty="0"/>
+          </a:p>
+        </p:txBody>
+      </p:sp>
+    </p:spTree>
+  </p:cSld>
+  <p:clrMapOvr>
+    <a:masterClrMapping/>
+  </p:clrMapOvr>
+</p:sld>
+</file>
+
+<file path=ppt/slides/slide20.xml><?xml version="1.0" encoding="utf-8"?>
+<p:sld xmlns:a="http://schemas.openxmlformats.org/drawingml/2006/main" xmlns:r="http://schemas.openxmlformats.org/officeDocument/2006/relationships" xmlns:p="http://schemas.openxmlformats.org/presentationml/2006/main">
+  <p:cSld name="Slide 20">
+    <p:bg>
+      <p:bgPr>
+        <a:blipFill dpi="0" rotWithShape="1">
+          <a:blip r:embed="rId1">
+            <a:lum/>
+          </a:blip>
+          <a:srcRect/>
+          <a:stretch>
+            <a:fillRect/>
+          </a:stretch>
+        </a:blipFill>
+        <a:effectLst/>
+      </p:bgPr>
+    </p:bg>
+    <p:spTree>
+      <p:nvGrpSpPr>
+        <p:cNvPr id="1" name=""/>
+        <p:cNvGrpSpPr/>
+        <p:nvPr/>
+      </p:nvGrpSpPr>
+      <p:grpSpPr>
+        <a:xfrm>
+          <a:off x="0" y="0"/>
+          <a:ext cx="0" cy="0"/>
+          <a:chOff x="0" y="0"/>
+          <a:chExt cx="0" cy="0"/>
+        </a:xfrm>
+      </p:grpSpPr>
+      <p:sp>
+        <p:nvSpPr>
+          <p:cNvPr id="2" name="Text 0"/>
+          <p:cNvSpPr/>
+          <p:nvPr/>
+        </p:nvSpPr>
+        <p:spPr>
+          <a:xfrm>
+            <a:off x="10362895" y="6016752"/>
+            <a:ext cx="1463040" cy="320040"/>
+          </a:xfrm>
+          <a:prstGeom prst="rect">
+            <a:avLst/>
+          </a:prstGeom>
+          <a:noFill/>
+          <a:ln/>
+        </p:spPr>
+        <p:txBody>
+          <a:bodyPr wrap="square" rtlCol="0" anchor="ctr"/>
+          <a:lstStyle/>
+          <a:p>
+            <a:pPr algn="r" indent="0" marL="0">
+              <a:buNone/>
+            </a:pPr>
+            <a:r>
+              <a:rPr lang="en-US" sz="1000" dirty="0">
+                <a:solidFill>
+                  <a:srgbClr val="8A9099"/>
+                </a:solidFill>
+                <a:latin typeface="微软雅黑" pitchFamily="34" charset="0"/>
+                <a:ea typeface="微软雅黑" pitchFamily="34" charset="-122"/>
+                <a:cs typeface="微软雅黑" pitchFamily="34" charset="-120"/>
+              </a:rPr>
+              <a:t>20 / 21</a:t>
+            </a:r>
+            <a:endParaRPr lang="en-US" sz="1000" dirty="0"/>
+          </a:p>
+        </p:txBody>
+      </p:sp>
+      <p:sp>
+        <p:nvSpPr>
+          <p:cNvPr id="3" name="Text 1"/>
+          <p:cNvSpPr/>
+          <p:nvPr/>
+        </p:nvSpPr>
+        <p:spPr>
+          <a:xfrm>
+            <a:off x="822960" y="960120"/>
+            <a:ext cx="10545775" cy="365760"/>
+          </a:xfrm>
+          <a:prstGeom prst="rect">
+            <a:avLst/>
+          </a:prstGeom>
+          <a:noFill/>
+          <a:ln/>
+        </p:spPr>
+        <p:txBody>
+          <a:bodyPr wrap="square" rtlCol="0" anchor="ctr"/>
+          <a:lstStyle/>
+          <a:p>
+            <a:pPr algn="l" indent="0" marL="0">
+              <a:buNone/>
+            </a:pPr>
+            <a:r>
+              <a:rPr lang="en-US" sz="1400" b="1" dirty="0">
+                <a:solidFill>
+                  <a:srgbClr val="1F4E9C"/>
+                </a:solidFill>
+                <a:latin typeface="微软雅黑" pitchFamily="34" charset="0"/>
+                <a:ea typeface="微软雅黑" pitchFamily="34" charset="-122"/>
+                <a:cs typeface="微软雅黑" pitchFamily="34" charset="-120"/>
+              </a:rPr>
+              <a:t>参考答案 · 模仿题</a:t>
+            </a:r>
+            <a:endParaRPr lang="en-US" sz="1400" dirty="0"/>
+          </a:p>
+        </p:txBody>
+      </p:sp>
+      <p:sp>
+        <p:nvSpPr>
+          <p:cNvPr id="4" name="Text 2"/>
+          <p:cNvSpPr/>
+          <p:nvPr/>
+        </p:nvSpPr>
+        <p:spPr>
+          <a:xfrm>
+            <a:off x="822960" y="1344168"/>
+            <a:ext cx="10545775" cy="731520"/>
+          </a:xfrm>
+          <a:prstGeom prst="rect">
+            <a:avLst/>
+          </a:prstGeom>
+          <a:noFill/>
+          <a:ln/>
+        </p:spPr>
+        <p:txBody>
+          <a:bodyPr wrap="square" rtlCol="0" anchor="ctr"/>
+          <a:lstStyle/>
+          <a:p>
+            <a:pPr algn="l" indent="0" marL="0">
+              <a:buNone/>
+            </a:pPr>
+            <a:r>
+              <a:rPr lang="en-US" sz="2800" b="1" dirty="0">
+                <a:solidFill>
+                  <a:srgbClr val="1F2329"/>
+                </a:solidFill>
+                <a:latin typeface="微软雅黑" pitchFamily="34" charset="0"/>
+                <a:ea typeface="微软雅黑" pitchFamily="34" charset="-122"/>
+                <a:cs typeface="微软雅黑" pitchFamily="34" charset="-120"/>
+              </a:rPr>
+              <a:t>模仿题参考答案（自行对照）</a:t>
+            </a:r>
+            <a:endParaRPr lang="en-US" sz="2800" dirty="0"/>
+          </a:p>
+        </p:txBody>
+      </p:sp>
+      <p:sp>
+        <p:nvSpPr>
+          <p:cNvPr id="5" name="Shape 3"/>
+          <p:cNvSpPr/>
+          <p:nvPr/>
+        </p:nvSpPr>
+        <p:spPr>
+          <a:xfrm>
+            <a:off x="822960" y="2395728"/>
+            <a:ext cx="10545775" cy="2221992"/>
+          </a:xfrm>
+          <a:prstGeom prst="rect">
+            <a:avLst/>
+          </a:prstGeom>
+          <a:solidFill>
+            <a:srgbClr val="F7F9FC"/>
+          </a:solidFill>
+          <a:ln/>
+        </p:spPr>
+      </p:sp>
+      <p:sp>
+        <p:nvSpPr>
+          <p:cNvPr id="6" name="Shape 4"/>
+          <p:cNvSpPr/>
+          <p:nvPr/>
+        </p:nvSpPr>
+        <p:spPr>
+          <a:xfrm>
+            <a:off x="822960" y="2395728"/>
+            <a:ext cx="50292" cy="2221992"/>
+          </a:xfrm>
+          <a:prstGeom prst="rect">
+            <a:avLst/>
+          </a:prstGeom>
+          <a:solidFill>
+            <a:srgbClr val="1F4E9C"/>
+          </a:solidFill>
+          <a:ln/>
+        </p:spPr>
+      </p:sp>
+      <p:sp>
+        <p:nvSpPr>
+          <p:cNvPr id="7" name="Text 5"/>
+          <p:cNvSpPr/>
+          <p:nvPr/>
+        </p:nvSpPr>
+        <p:spPr>
+          <a:xfrm>
+            <a:off x="1078992" y="2505456"/>
+            <a:ext cx="10033711" cy="2002536"/>
+          </a:xfrm>
+          <a:prstGeom prst="rect">
+            <a:avLst/>
+          </a:prstGeom>
+          <a:noFill/>
+          <a:ln/>
+        </p:spPr>
+        <p:txBody>
+          <a:bodyPr wrap="square" rtlCol="0" anchor="t"/>
+          <a:lstStyle/>
+          <a:p>
+            <a:pPr algn="l" indent="0" marL="0">
+              <a:lnSpc>
+                <a:spcPct val="125000"/>
+              </a:lnSpc>
+              <a:buNone/>
+            </a:pPr>
+            <a:r>
+              <a:rPr lang="en-US" sz="1400" dirty="0">
+                <a:solidFill>
+                  <a:srgbClr val="1F2329"/>
+                </a:solidFill>
+                <a:latin typeface="Consolas" pitchFamily="34" charset="0"/>
+                <a:ea typeface="Consolas" pitchFamily="34" charset="-122"/>
+                <a:cs typeface="Consolas" pitchFamily="34" charset="-120"/>
+              </a:rPr>
+              <a:t>#include &lt;stdio.h&gt;
+int main(){
+    double hours = 2.5;
+    printf("今天复习了%f小时\n", hours);
+    return 0;
+}
+// 输出：今天复习了2.500000小时（%f默认6位小数）
+</a:t>
+            </a:r>
+            <a:endParaRPr lang="en-US" sz="1400" dirty="0"/>
+          </a:p>
+        </p:txBody>
+      </p:sp>
+      <p:sp>
+        <p:nvSpPr>
+          <p:cNvPr id="8" name="Text 6"/>
+          <p:cNvSpPr/>
+          <p:nvPr/>
+        </p:nvSpPr>
+        <p:spPr>
+          <a:xfrm>
+            <a:off x="896112" y="4818888"/>
+            <a:ext cx="10454335" cy="397764"/>
+          </a:xfrm>
+          <a:prstGeom prst="rect">
+            <a:avLst/>
+          </a:prstGeom>
+          <a:noFill/>
+          <a:ln/>
+        </p:spPr>
+        <p:txBody>
+          <a:bodyPr wrap="square" rtlCol="0" anchor="t"/>
+          <a:lstStyle/>
+          <a:p>
+            <a:pPr algn="l" indent="0" marL="0">
+              <a:lnSpc>
+                <a:spcPct val="115000"/>
+              </a:lnSpc>
+              <a:buNone/>
+            </a:pPr>
+            <a:r>
+              <a:rPr lang="en-US" sz="1800" b="1" dirty="0">
+                <a:solidFill>
+                  <a:srgbClr val="1F4E9C"/>
+                </a:solidFill>
+                <a:latin typeface="微软雅黑" pitchFamily="34" charset="0"/>
+                <a:ea typeface="微软雅黑" pitchFamily="34" charset="-122"/>
+                <a:cs typeface="微软雅黑" pitchFamily="34" charset="-120"/>
+              </a:rPr>
+              <a:t>•  </a:t>
+            </a:r>
+            <a:pPr algn="l" indent="0" marL="0">
+              <a:lnSpc>
+                <a:spcPct val="115000"/>
+              </a:lnSpc>
+              <a:buNone/>
+            </a:pPr>
+            <a:r>
+              <a:rPr lang="en-US" sz="1800" dirty="0">
+                <a:solidFill>
+                  <a:srgbClr val="000000"/>
+                </a:solidFill>
+              </a:rPr>
+              <a:t>double 用 %f 打印，默认六位小数，2.5 会显示成 2.500000</a:t>
+            </a:r>
+            <a:endParaRPr lang="en-US" sz="1800" dirty="0"/>
+          </a:p>
+        </p:txBody>
+      </p:sp>
+      <p:sp>
+        <p:nvSpPr>
+          <p:cNvPr id="9" name="Text 7"/>
+          <p:cNvSpPr/>
+          <p:nvPr/>
+        </p:nvSpPr>
+        <p:spPr>
+          <a:xfrm>
+            <a:off x="896112" y="5289804"/>
+            <a:ext cx="10454335" cy="397764"/>
+          </a:xfrm>
+          <a:prstGeom prst="rect">
+            <a:avLst/>
+          </a:prstGeom>
+          <a:noFill/>
+          <a:ln/>
+        </p:spPr>
+        <p:txBody>
+          <a:bodyPr wrap="square" rtlCol="0" anchor="t"/>
+          <a:lstStyle/>
+          <a:p>
+            <a:pPr algn="l" indent="0" marL="0">
+              <a:lnSpc>
+                <a:spcPct val="115000"/>
+              </a:lnSpc>
+              <a:buNone/>
+            </a:pPr>
+            <a:r>
+              <a:rPr lang="en-US" sz="1800" b="1" dirty="0">
+                <a:solidFill>
+                  <a:srgbClr val="1F4E9C"/>
+                </a:solidFill>
+                <a:latin typeface="微软雅黑" pitchFamily="34" charset="0"/>
+                <a:ea typeface="微软雅黑" pitchFamily="34" charset="-122"/>
+                <a:cs typeface="微软雅黑" pitchFamily="34" charset="-120"/>
+              </a:rPr>
+              <a:t>•  </a:t>
+            </a:r>
+            <a:pPr algn="l" indent="0" marL="0">
+              <a:lnSpc>
+                <a:spcPct val="115000"/>
+              </a:lnSpc>
+              <a:buNone/>
+            </a:pPr>
+            <a:r>
+              <a:rPr lang="en-US" sz="1800" dirty="0">
+                <a:solidFill>
+                  <a:srgbClr val="000000"/>
+                </a:solidFill>
+              </a:rPr>
+              <a:t>格式符要和变量类型对齐：%d 配 int，%f 配 double</a:t>
+            </a:r>
+            <a:endParaRPr lang="en-US" sz="1800" dirty="0"/>
+          </a:p>
+        </p:txBody>
+      </p:sp>
+    </p:spTree>
+  </p:cSld>
+  <p:clrMapOvr>
+    <a:masterClrMapping/>
+  </p:clrMapOvr>
+</p:sld>
+</file>
+
+<file path=ppt/slides/slide21.xml><?xml version="1.0" encoding="utf-8"?>
+<p:sld xmlns:a="http://schemas.openxmlformats.org/drawingml/2006/main" xmlns:r="http://schemas.openxmlformats.org/officeDocument/2006/relationships" xmlns:p="http://schemas.openxmlformats.org/presentationml/2006/main">
+  <p:cSld name="Slide 21">
+    <p:bg>
+      <p:bgPr>
+        <a:blipFill dpi="0" rotWithShape="1">
+          <a:blip r:embed="rId1">
+            <a:lum/>
+          </a:blip>
+          <a:srcRect/>
+          <a:stretch>
+            <a:fillRect/>
+          </a:stretch>
+        </a:blipFill>
+        <a:effectLst/>
+      </p:bgPr>
+    </p:bg>
+    <p:spTree>
+      <p:nvGrpSpPr>
+        <p:cNvPr id="1" name=""/>
+        <p:cNvGrpSpPr/>
+        <p:nvPr/>
+      </p:nvGrpSpPr>
+      <p:grpSpPr>
+        <a:xfrm>
+          <a:off x="0" y="0"/>
+          <a:ext cx="0" cy="0"/>
+          <a:chOff x="0" y="0"/>
+          <a:chExt cx="0" cy="0"/>
+        </a:xfrm>
+      </p:grpSpPr>
+      <p:sp>
+        <p:nvSpPr>
+          <p:cNvPr id="2" name="Text 0"/>
+          <p:cNvSpPr/>
+          <p:nvPr/>
+        </p:nvSpPr>
+        <p:spPr>
+          <a:xfrm>
+            <a:off x="10362895" y="6016752"/>
+            <a:ext cx="1463040" cy="320040"/>
+          </a:xfrm>
+          <a:prstGeom prst="rect">
+            <a:avLst/>
+          </a:prstGeom>
+          <a:noFill/>
+          <a:ln/>
+        </p:spPr>
+        <p:txBody>
+          <a:bodyPr wrap="square" rtlCol="0" anchor="ctr"/>
+          <a:lstStyle/>
+          <a:p>
+            <a:pPr algn="r" indent="0" marL="0">
+              <a:buNone/>
+            </a:pPr>
+            <a:r>
+              <a:rPr lang="en-US" sz="1000" dirty="0">
+                <a:solidFill>
+                  <a:srgbClr val="8A9099"/>
+                </a:solidFill>
+                <a:latin typeface="微软雅黑" pitchFamily="34" charset="0"/>
+                <a:ea typeface="微软雅黑" pitchFamily="34" charset="-122"/>
+                <a:cs typeface="微软雅黑" pitchFamily="34" charset="-120"/>
+              </a:rPr>
+              <a:t>21 / 21</a:t>
+            </a:r>
+            <a:endParaRPr lang="en-US" sz="1000" dirty="0"/>
+          </a:p>
+        </p:txBody>
+      </p:sp>
+      <p:sp>
+        <p:nvSpPr>
+          <p:cNvPr id="3" name="Text 1"/>
+          <p:cNvSpPr/>
+          <p:nvPr/>
+        </p:nvSpPr>
+        <p:spPr>
+          <a:xfrm>
+            <a:off x="822960" y="960120"/>
+            <a:ext cx="10545775" cy="365760"/>
+          </a:xfrm>
+          <a:prstGeom prst="rect">
+            <a:avLst/>
+          </a:prstGeom>
+          <a:noFill/>
+          <a:ln/>
+        </p:spPr>
+        <p:txBody>
+          <a:bodyPr wrap="square" rtlCol="0" anchor="ctr"/>
+          <a:lstStyle/>
+          <a:p>
+            <a:pPr algn="l" indent="0" marL="0">
+              <a:buNone/>
+            </a:pPr>
+            <a:r>
+              <a:rPr lang="en-US" sz="1400" b="1" dirty="0">
+                <a:solidFill>
+                  <a:srgbClr val="1F4E9C"/>
+                </a:solidFill>
+                <a:latin typeface="微软雅黑" pitchFamily="34" charset="0"/>
+                <a:ea typeface="微软雅黑" pitchFamily="34" charset="-122"/>
+                <a:cs typeface="微软雅黑" pitchFamily="34" charset="-120"/>
+              </a:rPr>
+              <a:t>参考答案 · 挑战题</a:t>
+            </a:r>
+            <a:endParaRPr lang="en-US" sz="1400" dirty="0"/>
+          </a:p>
+        </p:txBody>
+      </p:sp>
+      <p:sp>
+        <p:nvSpPr>
+          <p:cNvPr id="4" name="Text 2"/>
+          <p:cNvSpPr/>
+          <p:nvPr/>
+        </p:nvSpPr>
+        <p:spPr>
+          <a:xfrm>
+            <a:off x="822960" y="1344168"/>
+            <a:ext cx="10545775" cy="731520"/>
+          </a:xfrm>
+          <a:prstGeom prst="rect">
+            <a:avLst/>
+          </a:prstGeom>
+          <a:noFill/>
+          <a:ln/>
+        </p:spPr>
+        <p:txBody>
+          <a:bodyPr wrap="square" rtlCol="0" anchor="ctr"/>
+          <a:lstStyle/>
+          <a:p>
+            <a:pPr algn="l" indent="0" marL="0">
+              <a:buNone/>
+            </a:pPr>
+            <a:r>
+              <a:rPr lang="en-US" sz="2800" b="1" dirty="0">
+                <a:solidFill>
+                  <a:srgbClr val="1F2329"/>
+                </a:solidFill>
+                <a:latin typeface="微软雅黑" pitchFamily="34" charset="0"/>
+                <a:ea typeface="微软雅黑" pitchFamily="34" charset="-122"/>
+                <a:cs typeface="微软雅黑" pitchFamily="34" charset="-120"/>
+              </a:rPr>
+              <a:t>挑战题参考答案（自行对照）</a:t>
+            </a:r>
+            <a:endParaRPr lang="en-US" sz="2800" dirty="0"/>
+          </a:p>
+        </p:txBody>
+      </p:sp>
+      <p:sp>
+        <p:nvSpPr>
+          <p:cNvPr id="5" name="Shape 3"/>
+          <p:cNvSpPr/>
+          <p:nvPr/>
+        </p:nvSpPr>
+        <p:spPr>
+          <a:xfrm>
+            <a:off x="822960" y="2395728"/>
+            <a:ext cx="10545775" cy="2221992"/>
+          </a:xfrm>
+          <a:prstGeom prst="rect">
+            <a:avLst/>
+          </a:prstGeom>
+          <a:solidFill>
+            <a:srgbClr val="F7F9FC"/>
+          </a:solidFill>
+          <a:ln/>
+        </p:spPr>
+      </p:sp>
+      <p:sp>
+        <p:nvSpPr>
+          <p:cNvPr id="6" name="Shape 4"/>
+          <p:cNvSpPr/>
+          <p:nvPr/>
+        </p:nvSpPr>
+        <p:spPr>
+          <a:xfrm>
+            <a:off x="822960" y="2395728"/>
+            <a:ext cx="50292" cy="2221992"/>
+          </a:xfrm>
+          <a:prstGeom prst="rect">
+            <a:avLst/>
+          </a:prstGeom>
+          <a:solidFill>
+            <a:srgbClr val="1F4E9C"/>
+          </a:solidFill>
+          <a:ln/>
+        </p:spPr>
+      </p:sp>
+      <p:sp>
+        <p:nvSpPr>
+          <p:cNvPr id="7" name="Text 5"/>
+          <p:cNvSpPr/>
+          <p:nvPr/>
+        </p:nvSpPr>
+        <p:spPr>
+          <a:xfrm>
+            <a:off x="1078992" y="2505456"/>
+            <a:ext cx="10033711" cy="2002536"/>
+          </a:xfrm>
+          <a:prstGeom prst="rect">
+            <a:avLst/>
+          </a:prstGeom>
+          <a:noFill/>
+          <a:ln/>
+        </p:spPr>
+        <p:txBody>
+          <a:bodyPr wrap="square" rtlCol="0" anchor="t"/>
+          <a:lstStyle/>
+          <a:p>
+            <a:pPr algn="l" indent="0" marL="0">
+              <a:lnSpc>
+                <a:spcPct val="125000"/>
+              </a:lnSpc>
+              <a:buNone/>
+            </a:pPr>
+            <a:r>
+              <a:rPr lang="en-US" sz="1400" dirty="0">
+                <a:solidFill>
+                  <a:srgbClr val="1F2329"/>
+                </a:solidFill>
+                <a:latin typeface="Consolas" pitchFamily="34" charset="0"/>
+                <a:ea typeface="Consolas" pitchFamily="34" charset="-122"/>
+                <a:cs typeface="Consolas" pitchFamily="34" charset="-120"/>
+              </a:rPr>
+              <a:t>#include &lt;stdio.h&gt;
+int main(){
+    int x = 3.9;
+    printf("%d\n", x);
+    return 0;
+}
+// 输出：3（小数部分被截断，不是四舍五入）
+</a:t>
+            </a:r>
+            <a:endParaRPr lang="en-US" sz="1400" dirty="0"/>
+          </a:p>
+        </p:txBody>
+      </p:sp>
+      <p:sp>
+        <p:nvSpPr>
+          <p:cNvPr id="8" name="Text 6"/>
+          <p:cNvSpPr/>
+          <p:nvPr/>
+        </p:nvSpPr>
+        <p:spPr>
+          <a:xfrm>
+            <a:off x="896112" y="4818888"/>
+            <a:ext cx="10454335" cy="397764"/>
+          </a:xfrm>
+          <a:prstGeom prst="rect">
+            <a:avLst/>
+          </a:prstGeom>
+          <a:noFill/>
+          <a:ln/>
+        </p:spPr>
+        <p:txBody>
+          <a:bodyPr wrap="square" rtlCol="0" anchor="t"/>
+          <a:lstStyle/>
+          <a:p>
+            <a:pPr algn="l" indent="0" marL="0">
+              <a:lnSpc>
+                <a:spcPct val="115000"/>
+              </a:lnSpc>
+              <a:buNone/>
+            </a:pPr>
+            <a:r>
+              <a:rPr lang="en-US" sz="1800" b="1" dirty="0">
+                <a:solidFill>
+                  <a:srgbClr val="1F4E9C"/>
+                </a:solidFill>
+                <a:latin typeface="微软雅黑" pitchFamily="34" charset="0"/>
+                <a:ea typeface="微软雅黑" pitchFamily="34" charset="-122"/>
+                <a:cs typeface="微软雅黑" pitchFamily="34" charset="-120"/>
+              </a:rPr>
+              <a:t>•  </a:t>
+            </a:r>
+            <a:pPr algn="l" indent="0" marL="0">
+              <a:lnSpc>
+                <a:spcPct val="115000"/>
+              </a:lnSpc>
+              <a:buNone/>
+            </a:pPr>
+            <a:r>
+              <a:rPr lang="en-US" sz="1800" dirty="0">
+                <a:solidFill>
+                  <a:srgbClr val="000000"/>
+                </a:solidFill>
+              </a:rPr>
+              <a:t>整数盒子里放 3.9，打印得到 3，小数部分被截断而非四舍五入</a:t>
+            </a:r>
+            <a:endParaRPr lang="en-US" sz="1800" dirty="0"/>
+          </a:p>
+        </p:txBody>
+      </p:sp>
+      <p:sp>
+        <p:nvSpPr>
+          <p:cNvPr id="9" name="Text 7"/>
+          <p:cNvSpPr/>
+          <p:nvPr/>
+        </p:nvSpPr>
+        <p:spPr>
+          <a:xfrm>
+            <a:off x="896112" y="5289804"/>
+            <a:ext cx="10454335" cy="397764"/>
+          </a:xfrm>
+          <a:prstGeom prst="rect">
+            <a:avLst/>
+          </a:prstGeom>
+          <a:noFill/>
+          <a:ln/>
+        </p:spPr>
+        <p:txBody>
+          <a:bodyPr wrap="square" rtlCol="0" anchor="t"/>
+          <a:lstStyle/>
+          <a:p>
+            <a:pPr algn="l" indent="0" marL="0">
+              <a:lnSpc>
+                <a:spcPct val="115000"/>
+              </a:lnSpc>
+              <a:buNone/>
+            </a:pPr>
+            <a:r>
+              <a:rPr lang="en-US" sz="1800" b="1" dirty="0">
+                <a:solidFill>
+                  <a:srgbClr val="1F4E9C"/>
+                </a:solidFill>
+                <a:latin typeface="微软雅黑" pitchFamily="34" charset="0"/>
+                <a:ea typeface="微软雅黑" pitchFamily="34" charset="-122"/>
+                <a:cs typeface="微软雅黑" pitchFamily="34" charset="-120"/>
+              </a:rPr>
+              <a:t>•  </a:t>
+            </a:r>
+            <a:pPr algn="l" indent="0" marL="0">
+              <a:lnSpc>
+                <a:spcPct val="115000"/>
+              </a:lnSpc>
+              <a:buNone/>
+            </a:pPr>
+            <a:r>
+              <a:rPr lang="en-US" sz="1800" dirty="0">
+                <a:solidFill>
+                  <a:srgbClr val="000000"/>
+                </a:solidFill>
+              </a:rPr>
+              <a:t>往 int 塞小数会丢小数位；类型不匹配编译器通常只警告不报错</a:t>
             </a:r>
             <a:endParaRPr lang="en-US" sz="1800" dirty="0"/>
           </a:p>
@@ -6644,7 +8088,7 @@
                 <a:ea typeface="微软雅黑" pitchFamily="34" charset="-122"/>
                 <a:cs typeface="微软雅黑" pitchFamily="34" charset="-120"/>
               </a:rPr>
-              <a:t>3 / 18</a:t>
+              <a:t>3 / 21</a:t>
             </a:r>
             <a:endParaRPr lang="en-US" sz="1000" dirty="0"/>
           </a:p>
@@ -6743,19 +8187,34 @@
             <a:avLst/>
           </a:prstGeom>
           <a:solidFill>
-            <a:srgbClr val="F5F6F7"/>
+            <a:srgbClr val="F7F9FC"/>
           </a:solidFill>
-          <a:ln w="9525">
-            <a:solidFill>
-              <a:srgbClr val="D8DBE0"/>
-            </a:solidFill>
-            <a:prstDash val="solid"/>
-          </a:ln>
-        </p:spPr>
-      </p:sp>
-      <p:sp>
-        <p:nvSpPr>
-          <p:cNvPr id="6" name="Text 4"/>
+          <a:ln/>
+        </p:spPr>
+      </p:sp>
+      <p:sp>
+        <p:nvSpPr>
+          <p:cNvPr id="6" name="Shape 4"/>
+          <p:cNvSpPr/>
+          <p:nvPr/>
+        </p:nvSpPr>
+        <p:spPr>
+          <a:xfrm>
+            <a:off x="822960" y="2395728"/>
+            <a:ext cx="50292" cy="1746504"/>
+          </a:xfrm>
+          <a:prstGeom prst="rect">
+            <a:avLst/>
+          </a:prstGeom>
+          <a:solidFill>
+            <a:srgbClr val="1F4E9C"/>
+          </a:solidFill>
+          <a:ln/>
+        </p:spPr>
+      </p:sp>
+      <p:sp>
+        <p:nvSpPr>
+          <p:cNvPr id="7" name="Text 5"/>
           <p:cNvSpPr/>
           <p:nvPr/>
         </p:nvSpPr>
@@ -6802,7 +8261,7 @@
       </p:sp>
       <p:sp>
         <p:nvSpPr>
-          <p:cNvPr id="7" name="Text 5"/>
+          <p:cNvPr id="8" name="Text 6"/>
           <p:cNvSpPr/>
           <p:nvPr/>
         </p:nvSpPr>
@@ -6858,7 +8317,7 @@
       </p:sp>
       <p:sp>
         <p:nvSpPr>
-          <p:cNvPr id="8" name="Text 6"/>
+          <p:cNvPr id="9" name="Text 7"/>
           <p:cNvSpPr/>
           <p:nvPr/>
         </p:nvSpPr>
@@ -6942,7 +8401,7 @@
       </p:sp>
       <p:sp>
         <p:nvSpPr>
-          <p:cNvPr id="9" name="Text 7"/>
+          <p:cNvPr id="10" name="Text 8"/>
           <p:cNvSpPr/>
           <p:nvPr/>
         </p:nvSpPr>
@@ -7082,7 +8541,7 @@
                 <a:ea typeface="微软雅黑" pitchFamily="34" charset="-122"/>
                 <a:cs typeface="微软雅黑" pitchFamily="34" charset="-120"/>
               </a:rPr>
-              <a:t>4 / 18</a:t>
+              <a:t>4 / 21</a:t>
             </a:r>
             <a:endParaRPr lang="en-US" sz="1000" dirty="0"/>
           </a:p>
@@ -8275,7 +9734,7 @@
                 <a:ea typeface="微软雅黑" pitchFamily="34" charset="-122"/>
                 <a:cs typeface="微软雅黑" pitchFamily="34" charset="-120"/>
               </a:rPr>
-              <a:t>5 / 18</a:t>
+              <a:t>5 / 21</a:t>
             </a:r>
             <a:endParaRPr lang="en-US" sz="1000" dirty="0"/>
           </a:p>
@@ -9911,7 +11370,7 @@
                 <a:ea typeface="微软雅黑" pitchFamily="34" charset="-122"/>
                 <a:cs typeface="微软雅黑" pitchFamily="34" charset="-120"/>
               </a:rPr>
-              <a:t>6 / 18</a:t>
+              <a:t>6 / 21</a:t>
             </a:r>
             <a:endParaRPr lang="en-US" sz="1000" dirty="0"/>
           </a:p>
@@ -10010,19 +11469,34 @@
             <a:avLst/>
           </a:prstGeom>
           <a:solidFill>
-            <a:srgbClr val="F5F6F7"/>
+            <a:srgbClr val="F7F9FC"/>
           </a:solidFill>
-          <a:ln w="9525">
-            <a:solidFill>
-              <a:srgbClr val="D8DBE0"/>
-            </a:solidFill>
-            <a:prstDash val="solid"/>
-          </a:ln>
-        </p:spPr>
-      </p:sp>
-      <p:sp>
-        <p:nvSpPr>
-          <p:cNvPr id="6" name="Text 4"/>
+          <a:ln/>
+        </p:spPr>
+      </p:sp>
+      <p:sp>
+        <p:nvSpPr>
+          <p:cNvPr id="6" name="Shape 4"/>
+          <p:cNvSpPr/>
+          <p:nvPr/>
+        </p:nvSpPr>
+        <p:spPr>
+          <a:xfrm>
+            <a:off x="822960" y="2395728"/>
+            <a:ext cx="50292" cy="1508760"/>
+          </a:xfrm>
+          <a:prstGeom prst="rect">
+            <a:avLst/>
+          </a:prstGeom>
+          <a:solidFill>
+            <a:srgbClr val="1F4E9C"/>
+          </a:solidFill>
+          <a:ln/>
+        </p:spPr>
+      </p:sp>
+      <p:sp>
+        <p:nvSpPr>
+          <p:cNvPr id="7" name="Text 5"/>
           <p:cNvSpPr/>
           <p:nvPr/>
         </p:nvSpPr>
@@ -10068,7 +11542,7 @@
       </p:sp>
       <p:sp>
         <p:nvSpPr>
-          <p:cNvPr id="7" name="Text 5"/>
+          <p:cNvPr id="8" name="Text 6"/>
           <p:cNvSpPr/>
           <p:nvPr/>
         </p:nvSpPr>
@@ -10138,7 +11612,7 @@
       </p:sp>
       <p:sp>
         <p:nvSpPr>
-          <p:cNvPr id="8" name="Text 6"/>
+          <p:cNvPr id="9" name="Text 7"/>
           <p:cNvSpPr/>
           <p:nvPr/>
         </p:nvSpPr>
@@ -10222,7 +11696,7 @@
       </p:sp>
       <p:sp>
         <p:nvSpPr>
-          <p:cNvPr id="9" name="Text 7"/>
+          <p:cNvPr id="10" name="Text 8"/>
           <p:cNvSpPr/>
           <p:nvPr/>
         </p:nvSpPr>
@@ -10348,7 +11822,7 @@
                 <a:ea typeface="微软雅黑" pitchFamily="34" charset="-122"/>
                 <a:cs typeface="微软雅黑" pitchFamily="34" charset="-120"/>
               </a:rPr>
-              <a:t>7 / 18</a:t>
+              <a:t>7 / 21</a:t>
             </a:r>
             <a:endParaRPr lang="en-US" sz="1000" dirty="0"/>
           </a:p>
@@ -10447,19 +11921,34 @@
             <a:avLst/>
           </a:prstGeom>
           <a:solidFill>
-            <a:srgbClr val="F5F6F7"/>
+            <a:srgbClr val="F7F9FC"/>
           </a:solidFill>
-          <a:ln w="9525">
-            <a:solidFill>
-              <a:srgbClr val="D8DBE0"/>
-            </a:solidFill>
-            <a:prstDash val="solid"/>
-          </a:ln>
-        </p:spPr>
-      </p:sp>
-      <p:sp>
-        <p:nvSpPr>
-          <p:cNvPr id="6" name="Text 4"/>
+          <a:ln/>
+        </p:spPr>
+      </p:sp>
+      <p:sp>
+        <p:nvSpPr>
+          <p:cNvPr id="6" name="Shape 4"/>
+          <p:cNvSpPr/>
+          <p:nvPr/>
+        </p:nvSpPr>
+        <p:spPr>
+          <a:xfrm>
+            <a:off x="822960" y="2395728"/>
+            <a:ext cx="50292" cy="1033272"/>
+          </a:xfrm>
+          <a:prstGeom prst="rect">
+            <a:avLst/>
+          </a:prstGeom>
+          <a:solidFill>
+            <a:srgbClr val="1F4E9C"/>
+          </a:solidFill>
+          <a:ln/>
+        </p:spPr>
+      </p:sp>
+      <p:sp>
+        <p:nvSpPr>
+          <p:cNvPr id="7" name="Text 5"/>
           <p:cNvSpPr/>
           <p:nvPr/>
         </p:nvSpPr>
@@ -10503,7 +11992,7 @@
       </p:sp>
       <p:sp>
         <p:nvSpPr>
-          <p:cNvPr id="7" name="Text 5"/>
+          <p:cNvPr id="8" name="Text 6"/>
           <p:cNvSpPr/>
           <p:nvPr/>
         </p:nvSpPr>
@@ -10573,7 +12062,7 @@
       </p:sp>
       <p:sp>
         <p:nvSpPr>
-          <p:cNvPr id="8" name="Text 6"/>
+          <p:cNvPr id="9" name="Text 7"/>
           <p:cNvSpPr/>
           <p:nvPr/>
         </p:nvSpPr>
@@ -10685,7 +12174,7 @@
       </p:sp>
       <p:sp>
         <p:nvSpPr>
-          <p:cNvPr id="9" name="Text 7"/>
+          <p:cNvPr id="10" name="Text 8"/>
           <p:cNvSpPr/>
           <p:nvPr/>
         </p:nvSpPr>
@@ -10825,7 +12314,7 @@
                 <a:ea typeface="微软雅黑" pitchFamily="34" charset="-122"/>
                 <a:cs typeface="微软雅黑" pitchFamily="34" charset="-120"/>
               </a:rPr>
-              <a:t>8 / 18</a:t>
+              <a:t>8 / 21</a:t>
             </a:r>
             <a:endParaRPr lang="en-US" sz="1000" dirty="0"/>
           </a:p>
@@ -10924,19 +12413,34 @@
             <a:avLst/>
           </a:prstGeom>
           <a:solidFill>
-            <a:srgbClr val="F5F6F7"/>
+            <a:srgbClr val="F7F9FC"/>
           </a:solidFill>
-          <a:ln w="9525">
-            <a:solidFill>
-              <a:srgbClr val="D8DBE0"/>
-            </a:solidFill>
-            <a:prstDash val="solid"/>
-          </a:ln>
-        </p:spPr>
-      </p:sp>
-      <p:sp>
-        <p:nvSpPr>
-          <p:cNvPr id="6" name="Text 4"/>
+          <a:ln/>
+        </p:spPr>
+      </p:sp>
+      <p:sp>
+        <p:nvSpPr>
+          <p:cNvPr id="6" name="Shape 4"/>
+          <p:cNvSpPr/>
+          <p:nvPr/>
+        </p:nvSpPr>
+        <p:spPr>
+          <a:xfrm>
+            <a:off x="822960" y="2395728"/>
+            <a:ext cx="50292" cy="1271016"/>
+          </a:xfrm>
+          <a:prstGeom prst="rect">
+            <a:avLst/>
+          </a:prstGeom>
+          <a:solidFill>
+            <a:srgbClr val="1F4E9C"/>
+          </a:solidFill>
+          <a:ln/>
+        </p:spPr>
+      </p:sp>
+      <p:sp>
+        <p:nvSpPr>
+          <p:cNvPr id="7" name="Text 5"/>
           <p:cNvSpPr/>
           <p:nvPr/>
         </p:nvSpPr>
@@ -10981,7 +12485,7 @@
       </p:sp>
       <p:sp>
         <p:nvSpPr>
-          <p:cNvPr id="7" name="Text 5"/>
+          <p:cNvPr id="8" name="Text 6"/>
           <p:cNvSpPr/>
           <p:nvPr/>
         </p:nvSpPr>
@@ -11037,7 +12541,7 @@
       </p:sp>
       <p:sp>
         <p:nvSpPr>
-          <p:cNvPr id="8" name="Text 6"/>
+          <p:cNvPr id="9" name="Text 7"/>
           <p:cNvSpPr/>
           <p:nvPr/>
         </p:nvSpPr>
@@ -11093,7 +12597,7 @@
       </p:sp>
       <p:sp>
         <p:nvSpPr>
-          <p:cNvPr id="9" name="Text 7"/>
+          <p:cNvPr id="10" name="Text 8"/>
           <p:cNvSpPr/>
           <p:nvPr/>
         </p:nvSpPr>
@@ -11219,7 +12723,7 @@
                 <a:ea typeface="微软雅黑" pitchFamily="34" charset="-122"/>
                 <a:cs typeface="微软雅黑" pitchFamily="34" charset="-120"/>
               </a:rPr>
-              <a:t>9 / 18</a:t>
+              <a:t>9 / 21</a:t>
             </a:r>
             <a:endParaRPr lang="en-US" sz="1000" dirty="0"/>
           </a:p>
